--- a/presentations/PL_L04_IDEControlRoom_Lesson.pptx
+++ b/presentations/PL_L04_IDEControlRoom_Lesson.pptx
@@ -2,30 +2,30 @@
 <file path=ppt/presentation.xml><?xml version="1.0" encoding="utf-8"?>
 <p:presentation xmlns:p="http://schemas.openxmlformats.org/presentationml/2006/main">
   <p:sldMasterIdLst>
-    <p:sldMasterId xmlns:r="http://schemas.openxmlformats.org/officeDocument/2006/relationships" id="2147483648" r:id="R37a0272d93464800"/>
+    <p:sldMasterId xmlns:r="http://schemas.openxmlformats.org/officeDocument/2006/relationships" id="2147483648" r:id="R2c131c9eaa2f4492"/>
   </p:sldMasterIdLst>
   <p:notesMasterIdLst>
-    <p:notesMasterId xmlns:r="http://schemas.openxmlformats.org/officeDocument/2006/relationships" r:id="Ref2fa4c4dd994fc7"/>
+    <p:notesMasterId xmlns:r="http://schemas.openxmlformats.org/officeDocument/2006/relationships" r:id="R809f84c49488447c"/>
   </p:notesMasterIdLst>
   <p:sldIdLst>
-    <p:sldId xmlns:r="http://schemas.openxmlformats.org/officeDocument/2006/relationships" id="256" r:id="R292b9e1116554b9f"/>
-    <p:sldId xmlns:r="http://schemas.openxmlformats.org/officeDocument/2006/relationships" id="257" r:id="Rbdaca82e24684c9f"/>
-    <p:sldId xmlns:r="http://schemas.openxmlformats.org/officeDocument/2006/relationships" id="258" r:id="R83922d4cae544765"/>
-    <p:sldId xmlns:r="http://schemas.openxmlformats.org/officeDocument/2006/relationships" id="259" r:id="R6743f98dbc0e4432"/>
-    <p:sldId xmlns:r="http://schemas.openxmlformats.org/officeDocument/2006/relationships" id="260" r:id="Rf1e9332b73004860"/>
-    <p:sldId xmlns:r="http://schemas.openxmlformats.org/officeDocument/2006/relationships" id="261" r:id="R9ccb24d6ab8c4837"/>
-    <p:sldId xmlns:r="http://schemas.openxmlformats.org/officeDocument/2006/relationships" id="262" r:id="R152bf73b81f54478"/>
-    <p:sldId xmlns:r="http://schemas.openxmlformats.org/officeDocument/2006/relationships" id="263" r:id="R6f66a47314c44103"/>
-    <p:sldId xmlns:r="http://schemas.openxmlformats.org/officeDocument/2006/relationships" id="264" r:id="R7a0338247a6640f9"/>
-    <p:sldId xmlns:r="http://schemas.openxmlformats.org/officeDocument/2006/relationships" id="265" r:id="Rdcb633d9177649ee"/>
-    <p:sldId xmlns:r="http://schemas.openxmlformats.org/officeDocument/2006/relationships" id="266" r:id="R0d61d92186d6481d"/>
-    <p:sldId xmlns:r="http://schemas.openxmlformats.org/officeDocument/2006/relationships" id="267" r:id="R1cd5269d8fd94ae7"/>
-    <p:sldId xmlns:r="http://schemas.openxmlformats.org/officeDocument/2006/relationships" id="268" r:id="R54c5a99213fe47fe"/>
-    <p:sldId xmlns:r="http://schemas.openxmlformats.org/officeDocument/2006/relationships" id="269" r:id="R969074fe101448f2"/>
-    <p:sldId xmlns:r="http://schemas.openxmlformats.org/officeDocument/2006/relationships" id="270" r:id="R046b9400af04430f"/>
-    <p:sldId xmlns:r="http://schemas.openxmlformats.org/officeDocument/2006/relationships" id="271" r:id="Re1dc21c1409e4350"/>
-    <p:sldId xmlns:r="http://schemas.openxmlformats.org/officeDocument/2006/relationships" id="272" r:id="Rd3a1eac829ac465c"/>
-    <p:sldId xmlns:r="http://schemas.openxmlformats.org/officeDocument/2006/relationships" id="273" r:id="R30670558e4d243ff"/>
+    <p:sldId xmlns:r="http://schemas.openxmlformats.org/officeDocument/2006/relationships" id="256" r:id="R31e0329c87f44bb5"/>
+    <p:sldId xmlns:r="http://schemas.openxmlformats.org/officeDocument/2006/relationships" id="257" r:id="R203dca536ab64fb0"/>
+    <p:sldId xmlns:r="http://schemas.openxmlformats.org/officeDocument/2006/relationships" id="258" r:id="R292d176e60fa4aee"/>
+    <p:sldId xmlns:r="http://schemas.openxmlformats.org/officeDocument/2006/relationships" id="259" r:id="R3960b48aec664789"/>
+    <p:sldId xmlns:r="http://schemas.openxmlformats.org/officeDocument/2006/relationships" id="260" r:id="R57175771feb246cf"/>
+    <p:sldId xmlns:r="http://schemas.openxmlformats.org/officeDocument/2006/relationships" id="261" r:id="Radedca45ba4b4180"/>
+    <p:sldId xmlns:r="http://schemas.openxmlformats.org/officeDocument/2006/relationships" id="262" r:id="Ra7b9673e0b734e62"/>
+    <p:sldId xmlns:r="http://schemas.openxmlformats.org/officeDocument/2006/relationships" id="263" r:id="Rce2114719b974e46"/>
+    <p:sldId xmlns:r="http://schemas.openxmlformats.org/officeDocument/2006/relationships" id="264" r:id="R3592bda8018c447d"/>
+    <p:sldId xmlns:r="http://schemas.openxmlformats.org/officeDocument/2006/relationships" id="265" r:id="R23c1fe32f7f846f8"/>
+    <p:sldId xmlns:r="http://schemas.openxmlformats.org/officeDocument/2006/relationships" id="266" r:id="R49d1d01654c34dc7"/>
+    <p:sldId xmlns:r="http://schemas.openxmlformats.org/officeDocument/2006/relationships" id="267" r:id="R21fed50fedf646e2"/>
+    <p:sldId xmlns:r="http://schemas.openxmlformats.org/officeDocument/2006/relationships" id="268" r:id="Rec774417b59548d3"/>
+    <p:sldId xmlns:r="http://schemas.openxmlformats.org/officeDocument/2006/relationships" id="269" r:id="Rdb323c9f70aa4c59"/>
+    <p:sldId xmlns:r="http://schemas.openxmlformats.org/officeDocument/2006/relationships" id="270" r:id="R5bda2100d5e740ca"/>
+    <p:sldId xmlns:r="http://schemas.openxmlformats.org/officeDocument/2006/relationships" id="271" r:id="R1809e5f1a24c40f9"/>
+    <p:sldId xmlns:r="http://schemas.openxmlformats.org/officeDocument/2006/relationships" id="272" r:id="R625e3c4b973247ab"/>
+    <p:sldId xmlns:r="http://schemas.openxmlformats.org/officeDocument/2006/relationships" id="273" r:id="R99d5073576b14b2b"/>
   </p:sldIdLst>
   <p:sldSz cx="12192000" cy="6858000"/>
   <p:notesSz cx="6858000" cy="9144000"/>
@@ -459,7 +459,7 @@
           <a:lstStyle xmlns:a="http://schemas.openxmlformats.org/drawingml/2006/main"/>
           <a:p xmlns:a="http://schemas.openxmlformats.org/drawingml/2006/main">
             <a:r>
-              <a:t>Revise360 original lesson content. Teaching examples support OCR J277 Topic 2.5. The low-level instruction model is explanatory enrichment, not an additional required instruction set.</a:t>
+              <a:t>Revise360 original lesson content. Teaching examples support OCR J277 Topic 2.5. Scope: OCR J277 specification v3.1, May 2026, printed page 21, sections 2.5.1 and 2.5.2. https://www.ocr.org.uk/images/558027-specification-gcse-computer-science-j277.pdf</a:t>
             </a:r>
           </a:p>
         </p:txBody>
@@ -529,7 +529,7 @@
           <a:lstStyle xmlns:a="http://schemas.openxmlformats.org/drawingml/2006/main"/>
           <a:p xmlns:a="http://schemas.openxmlformats.org/drawingml/2006/main">
             <a:r>
-              <a:t>Revise360 original lesson content. Teaching examples support OCR J277 Topic 2.5. The low-level instruction model is explanatory enrichment, not an additional required instruction set.</a:t>
+              <a:t>Revise360 original lesson content. Teaching examples support OCR J277 Topic 2.5. Scope: OCR J277 specification v3.1, May 2026, printed page 21, sections 2.5.1 and 2.5.2. https://www.ocr.org.uk/images/558027-specification-gcse-computer-science-j277.pdf</a:t>
             </a:r>
           </a:p>
         </p:txBody>
@@ -599,7 +599,7 @@
           <a:lstStyle xmlns:a="http://schemas.openxmlformats.org/drawingml/2006/main"/>
           <a:p xmlns:a="http://schemas.openxmlformats.org/drawingml/2006/main">
             <a:r>
-              <a:t>Revise360 original lesson content. Teaching examples support OCR J277 Topic 2.5. The low-level instruction model is explanatory enrichment, not an additional required instruction set.</a:t>
+              <a:t>Revise360 original lesson content. Teaching examples support OCR J277 Topic 2.5. Scope: OCR J277 specification v3.1, May 2026, printed page 21, sections 2.5.1 and 2.5.2. https://www.ocr.org.uk/images/558027-specification-gcse-computer-science-j277.pdf</a:t>
             </a:r>
           </a:p>
         </p:txBody>
@@ -669,7 +669,7 @@
           <a:lstStyle xmlns:a="http://schemas.openxmlformats.org/drawingml/2006/main"/>
           <a:p xmlns:a="http://schemas.openxmlformats.org/drawingml/2006/main">
             <a:r>
-              <a:t>Revise360 original lesson content. Teaching examples support OCR J277 Topic 2.5. The low-level instruction model is explanatory enrichment, not an additional required instruction set.</a:t>
+              <a:t>Revise360 original lesson content. Teaching examples support OCR J277 Topic 2.5. Scope: OCR J277 specification v3.1, May 2026, printed page 21, sections 2.5.1 and 2.5.2. https://www.ocr.org.uk/images/558027-specification-gcse-computer-science-j277.pdf</a:t>
             </a:r>
           </a:p>
         </p:txBody>
@@ -739,7 +739,7 @@
           <a:lstStyle xmlns:a="http://schemas.openxmlformats.org/drawingml/2006/main"/>
           <a:p xmlns:a="http://schemas.openxmlformats.org/drawingml/2006/main">
             <a:r>
-              <a:t>Revise360 original lesson content. Teaching examples support OCR J277 Topic 2.5. The low-level instruction model is explanatory enrichment, not an additional required instruction set.</a:t>
+              <a:t>Revise360 original lesson content. Teaching examples support OCR J277 Topic 2.5. Scope: OCR J277 specification v3.1, May 2026, printed page 21, sections 2.5.1 and 2.5.2. https://www.ocr.org.uk/images/558027-specification-gcse-computer-science-j277.pdf</a:t>
             </a:r>
           </a:p>
         </p:txBody>
@@ -809,7 +809,7 @@
           <a:lstStyle xmlns:a="http://schemas.openxmlformats.org/drawingml/2006/main"/>
           <a:p xmlns:a="http://schemas.openxmlformats.org/drawingml/2006/main">
             <a:r>
-              <a:t>Revise360 original lesson content. Teaching examples support OCR J277 Topic 2.5. The low-level instruction model is explanatory enrichment, not an additional required instruction set.</a:t>
+              <a:t>Revise360 original lesson content. Teaching examples support OCR J277 Topic 2.5. Scope: OCR J277 specification v3.1, May 2026, printed page 21, sections 2.5.1 and 2.5.2. https://www.ocr.org.uk/images/558027-specification-gcse-computer-science-j277.pdf</a:t>
             </a:r>
           </a:p>
         </p:txBody>
@@ -879,7 +879,7 @@
           <a:lstStyle xmlns:a="http://schemas.openxmlformats.org/drawingml/2006/main"/>
           <a:p xmlns:a="http://schemas.openxmlformats.org/drawingml/2006/main">
             <a:r>
-              <a:t>Revise360 original lesson content. Teaching examples support OCR J277 Topic 2.5. The low-level instruction model is explanatory enrichment, not an additional required instruction set.</a:t>
+              <a:t>Revise360 original lesson content. Teaching examples support OCR J277 Topic 2.5. Scope: OCR J277 specification v3.1, May 2026, printed page 21, sections 2.5.1 and 2.5.2. https://www.ocr.org.uk/images/558027-specification-gcse-computer-science-j277.pdf</a:t>
             </a:r>
           </a:p>
         </p:txBody>
@@ -949,7 +949,7 @@
           <a:lstStyle xmlns:a="http://schemas.openxmlformats.org/drawingml/2006/main"/>
           <a:p xmlns:a="http://schemas.openxmlformats.org/drawingml/2006/main">
             <a:r>
-              <a:t>Revise360 original lesson content. Teaching examples support OCR J277 Topic 2.5. The low-level instruction model is explanatory enrichment, not an additional required instruction set.</a:t>
+              <a:t>Revise360 original lesson content. Teaching examples support OCR J277 Topic 2.5. Scope: OCR J277 specification v3.1, May 2026, printed page 21, sections 2.5.1 and 2.5.2. https://www.ocr.org.uk/images/558027-specification-gcse-computer-science-j277.pdf</a:t>
             </a:r>
           </a:p>
         </p:txBody>
@@ -1019,7 +1019,7 @@
           <a:lstStyle xmlns:a="http://schemas.openxmlformats.org/drawingml/2006/main"/>
           <a:p xmlns:a="http://schemas.openxmlformats.org/drawingml/2006/main">
             <a:r>
-              <a:t>Revise360 original lesson content. Teaching examples support OCR J277 Topic 2.5. The low-level instruction model is explanatory enrichment, not an additional required instruction set.</a:t>
+              <a:t>Revise360 original lesson content. Teaching examples support OCR J277 Topic 2.5. Scope: OCR J277 specification v3.1, May 2026, printed page 21, sections 2.5.1 and 2.5.2. https://www.ocr.org.uk/images/558027-specification-gcse-computer-science-j277.pdf</a:t>
             </a:r>
           </a:p>
         </p:txBody>
@@ -1089,7 +1089,7 @@
           <a:lstStyle xmlns:a="http://schemas.openxmlformats.org/drawingml/2006/main"/>
           <a:p xmlns:a="http://schemas.openxmlformats.org/drawingml/2006/main">
             <a:r>
-              <a:t>Revise360 original lesson content. Teaching examples support OCR J277 Topic 2.5. The low-level instruction model is explanatory enrichment, not an additional required instruction set.</a:t>
+              <a:t>Revise360 original lesson content. Teaching examples support OCR J277 Topic 2.5. Scope: OCR J277 specification v3.1, May 2026, printed page 21, sections 2.5.1 and 2.5.2. https://www.ocr.org.uk/images/558027-specification-gcse-computer-science-j277.pdf</a:t>
             </a:r>
           </a:p>
         </p:txBody>
@@ -1159,7 +1159,7 @@
           <a:lstStyle xmlns:a="http://schemas.openxmlformats.org/drawingml/2006/main"/>
           <a:p xmlns:a="http://schemas.openxmlformats.org/drawingml/2006/main">
             <a:r>
-              <a:t>Revise360 original lesson content. Teaching examples support OCR J277 Topic 2.5. The low-level instruction model is explanatory enrichment, not an additional required instruction set.</a:t>
+              <a:t>Revise360 original lesson content. Teaching examples support OCR J277 Topic 2.5. Scope: OCR J277 specification v3.1, May 2026, printed page 21, sections 2.5.1 and 2.5.2. https://www.ocr.org.uk/images/558027-specification-gcse-computer-science-j277.pdf</a:t>
             </a:r>
           </a:p>
         </p:txBody>
@@ -1229,7 +1229,7 @@
           <a:lstStyle xmlns:a="http://schemas.openxmlformats.org/drawingml/2006/main"/>
           <a:p xmlns:a="http://schemas.openxmlformats.org/drawingml/2006/main">
             <a:r>
-              <a:t>Revise360 original lesson content. Teaching examples support OCR J277 Topic 2.5. The low-level instruction model is explanatory enrichment, not an additional required instruction set.</a:t>
+              <a:t>Revise360 original lesson content. Teaching examples support OCR J277 Topic 2.5. Scope: OCR J277 specification v3.1, May 2026, printed page 21, sections 2.5.1 and 2.5.2. https://www.ocr.org.uk/images/558027-specification-gcse-computer-science-j277.pdf</a:t>
             </a:r>
           </a:p>
         </p:txBody>
@@ -1299,7 +1299,7 @@
           <a:lstStyle xmlns:a="http://schemas.openxmlformats.org/drawingml/2006/main"/>
           <a:p xmlns:a="http://schemas.openxmlformats.org/drawingml/2006/main">
             <a:r>
-              <a:t>Revise360 original lesson content. Teaching examples support OCR J277 Topic 2.5. The low-level instruction model is explanatory enrichment, not an additional required instruction set.</a:t>
+              <a:t>Revise360 original lesson content. Teaching examples support OCR J277 Topic 2.5. Scope: OCR J277 specification v3.1, May 2026, printed page 21, sections 2.5.1 and 2.5.2. https://www.ocr.org.uk/images/558027-specification-gcse-computer-science-j277.pdf</a:t>
             </a:r>
           </a:p>
         </p:txBody>
@@ -1369,7 +1369,7 @@
           <a:lstStyle xmlns:a="http://schemas.openxmlformats.org/drawingml/2006/main"/>
           <a:p xmlns:a="http://schemas.openxmlformats.org/drawingml/2006/main">
             <a:r>
-              <a:t>Revise360 original lesson content. Teaching examples support OCR J277 Topic 2.5. The low-level instruction model is explanatory enrichment, not an additional required instruction set.</a:t>
+              <a:t>Revise360 original lesson content. Teaching examples support OCR J277 Topic 2.5. Scope: OCR J277 specification v3.1, May 2026, printed page 21, sections 2.5.1 and 2.5.2. https://www.ocr.org.uk/images/558027-specification-gcse-computer-science-j277.pdf</a:t>
             </a:r>
           </a:p>
         </p:txBody>
@@ -1439,7 +1439,7 @@
           <a:lstStyle xmlns:a="http://schemas.openxmlformats.org/drawingml/2006/main"/>
           <a:p xmlns:a="http://schemas.openxmlformats.org/drawingml/2006/main">
             <a:r>
-              <a:t>Revise360 original lesson content. Teaching examples support OCR J277 Topic 2.5. The low-level instruction model is explanatory enrichment, not an additional required instruction set.</a:t>
+              <a:t>Revise360 original lesson content. Teaching examples support OCR J277 Topic 2.5. Scope: OCR J277 specification v3.1, May 2026, printed page 21, sections 2.5.1 and 2.5.2. https://www.ocr.org.uk/images/558027-specification-gcse-computer-science-j277.pdf</a:t>
             </a:r>
           </a:p>
         </p:txBody>
@@ -1509,7 +1509,7 @@
           <a:lstStyle xmlns:a="http://schemas.openxmlformats.org/drawingml/2006/main"/>
           <a:p xmlns:a="http://schemas.openxmlformats.org/drawingml/2006/main">
             <a:r>
-              <a:t>Revise360 original lesson content. Teaching examples support OCR J277 Topic 2.5. The low-level instruction model is explanatory enrichment, not an additional required instruction set.</a:t>
+              <a:t>Revise360 original lesson content. Teaching examples support OCR J277 Topic 2.5. Scope: OCR J277 specification v3.1, May 2026, printed page 21, sections 2.5.1 and 2.5.2. https://www.ocr.org.uk/images/558027-specification-gcse-computer-science-j277.pdf</a:t>
             </a:r>
           </a:p>
         </p:txBody>
@@ -1579,7 +1579,7 @@
           <a:lstStyle xmlns:a="http://schemas.openxmlformats.org/drawingml/2006/main"/>
           <a:p xmlns:a="http://schemas.openxmlformats.org/drawingml/2006/main">
             <a:r>
-              <a:t>Revise360 original lesson content. Teaching examples support OCR J277 Topic 2.5. The low-level instruction model is explanatory enrichment, not an additional required instruction set.</a:t>
+              <a:t>Revise360 original lesson content. Teaching examples support OCR J277 Topic 2.5. Scope: OCR J277 specification v3.1, May 2026, printed page 21, sections 2.5.1 and 2.5.2. https://www.ocr.org.uk/images/558027-specification-gcse-computer-science-j277.pdf</a:t>
             </a:r>
           </a:p>
         </p:txBody>
@@ -1649,7 +1649,7 @@
           <a:lstStyle xmlns:a="http://schemas.openxmlformats.org/drawingml/2006/main"/>
           <a:p xmlns:a="http://schemas.openxmlformats.org/drawingml/2006/main">
             <a:r>
-              <a:t>Revise360 original lesson content. Teaching examples support OCR J277 Topic 2.5. The low-level instruction model is explanatory enrichment, not an additional required instruction set.</a:t>
+              <a:t>Revise360 original lesson content. Teaching examples support OCR J277 Topic 2.5. Scope: OCR J277 specification v3.1, May 2026, printed page 21, sections 2.5.1 and 2.5.2. https://www.ocr.org.uk/images/558027-specification-gcse-computer-science-j277.pdf</a:t>
             </a:r>
           </a:p>
         </p:txBody>
@@ -1717,7 +1717,7 @@
   </p:cSld>
   <p:clrMap bg1="lt1" tx1="dk1" bg2="lt2" tx2="dk2" accent1="accent1" accent2="accent2" accent3="accent3" accent4="accent4" accent5="accent5" accent6="accent6" hlink="hlink" folHlink="folHlink"/>
   <p:sldLayoutIdLst>
-    <p:sldLayoutId xmlns:r="http://schemas.openxmlformats.org/officeDocument/2006/relationships" id="2147483649" r:id="R5e78596450cf45e9"/>
+    <p:sldLayoutId xmlns:r="http://schemas.openxmlformats.org/officeDocument/2006/relationships" id="2147483649" r:id="Rbbff23435e7e435e"/>
   </p:sldLayoutIdLst>
   <p:txStyles>
     <p:titleStyle>
@@ -2418,7 +2418,7 @@
           <p:nvPr/>
         </p:nvPicPr>
         <p:blipFill>
-          <a:blip xmlns:r="http://schemas.openxmlformats.org/officeDocument/2006/relationships" xmlns:a="http://schemas.openxmlformats.org/drawingml/2006/main" r:embed="R04ebff4fae1442c5"/>
+          <a:blip xmlns:r="http://schemas.openxmlformats.org/officeDocument/2006/relationships" xmlns:a="http://schemas.openxmlformats.org/drawingml/2006/main" r:embed="Rf1138e4e974c44ee"/>
           <a:stretch xmlns:a="http://schemas.openxmlformats.org/drawingml/2006/main"/>
         </p:blipFill>
         <p:spPr>
@@ -2542,7 +2542,7 @@
                 <a:ea typeface="DejaVu Sans"/>
                 <a:cs typeface="DejaVu Sans"/>
               </a:rPr>
-              <a:t>IDE tools and debugging</a:t>
+              <a:t>IDE facilities</a:t>
             </a:r>
           </a:p>
         </p:txBody>
@@ -2672,7 +2672,7 @@
           <p:nvPr/>
         </p:nvPicPr>
         <p:blipFill>
-          <a:blip xmlns:r="http://schemas.openxmlformats.org/officeDocument/2006/relationships" xmlns:a="http://schemas.openxmlformats.org/drawingml/2006/main" r:embed="R40f6badbc9f141e0"/>
+          <a:blip xmlns:r="http://schemas.openxmlformats.org/officeDocument/2006/relationships" xmlns:a="http://schemas.openxmlformats.org/drawingml/2006/main" r:embed="R1f3932151def41c5"/>
           <a:stretch xmlns:a="http://schemas.openxmlformats.org/drawingml/2006/main"/>
         </p:blipFill>
         <p:spPr>
@@ -2869,7 +2869,7 @@
           <p:nvPr/>
         </p:nvPicPr>
         <p:blipFill>
-          <a:blip xmlns:r="http://schemas.openxmlformats.org/officeDocument/2006/relationships" xmlns:a="http://schemas.openxmlformats.org/drawingml/2006/main" r:embed="R15ef55aa5d9e4bc7"/>
+          <a:blip xmlns:r="http://schemas.openxmlformats.org/officeDocument/2006/relationships" xmlns:a="http://schemas.openxmlformats.org/drawingml/2006/main" r:embed="R9cb8ac4828d44695"/>
           <a:stretch xmlns:a="http://schemas.openxmlformats.org/drawingml/2006/main"/>
         </p:blipFill>
         <p:spPr>
@@ -3051,7 +3051,7 @@
                 <a:ea typeface="DejaVu Sans"/>
                 <a:cs typeface="DejaVu Sans"/>
               </a:rPr>
-              <a:t>Finding a logic error</a:t>
+              <a:t>Using your class IDE</a:t>
             </a:r>
           </a:p>
         </p:txBody>
@@ -3109,7 +3109,7 @@
                 <a:ea typeface="DejaVu Sans"/>
                 <a:cs typeface="DejaVu Sans"/>
               </a:rPr>
-              <a:t>Replace price + quantity with price * quantity. Test that 6 and 4 produce 24, then try another case.</a:t>
+              <a:t>Use the editor to change the source. Use the run-time environment to execute it and view the new message.</a:t>
             </a:r>
           </a:p>
         </p:txBody>
@@ -3414,7 +3414,7 @@
           <p:nvPr/>
         </p:nvPicPr>
         <p:blipFill>
-          <a:blip xmlns:r="http://schemas.openxmlformats.org/officeDocument/2006/relationships" xmlns:a="http://schemas.openxmlformats.org/drawingml/2006/main" r:embed="R40b370b9ed674279"/>
+          <a:blip xmlns:r="http://schemas.openxmlformats.org/officeDocument/2006/relationships" xmlns:a="http://schemas.openxmlformats.org/drawingml/2006/main" r:embed="Ra042aeb6b4b5499d"/>
           <a:stretch xmlns:a="http://schemas.openxmlformats.org/drawingml/2006/main"/>
         </p:blipFill>
         <p:spPr>
@@ -3654,7 +3654,7 @@
                 <a:ea typeface="DejaVu Sans"/>
                 <a:cs typeface="DejaVu Sans"/>
               </a:rPr>
-              <a:t>The programmer can edit, run and investigate code in one place, reducing switching between separate tools.</a:t>
+              <a:t>It brings tools for editing, diagnosing errors, translating and running together in one application.</a:t>
             </a:r>
           </a:p>
         </p:txBody>
@@ -3828,7 +3828,7 @@
                 <a:ea typeface="DejaVu Sans"/>
                 <a:cs typeface="DejaVu Sans"/>
               </a:rPr>
-              <a:t>3  Translation and execution</a:t>
+              <a:t>3  The run-time environment</a:t>
             </a:r>
           </a:p>
         </p:txBody>
@@ -4075,7 +4075,7 @@
           <p:nvPr/>
         </p:nvPicPr>
         <p:blipFill>
-          <a:blip xmlns:r="http://schemas.openxmlformats.org/officeDocument/2006/relationships" xmlns:a="http://schemas.openxmlformats.org/drawingml/2006/main" r:embed="R76fc97637fad4185"/>
+          <a:blip xmlns:r="http://schemas.openxmlformats.org/officeDocument/2006/relationships" xmlns:a="http://schemas.openxmlformats.org/drawingml/2006/main" r:embed="R689db8d64b8b49f4"/>
           <a:stretch xmlns:a="http://schemas.openxmlformats.org/drawingml/2006/main"/>
         </p:blipFill>
         <p:spPr>
@@ -4373,7 +4373,7 @@
                 <a:ea typeface="DejaVu Sans"/>
                 <a:cs typeface="DejaVu Sans"/>
               </a:rPr>
-              <a:t>5  Pausing and stepping</a:t>
+              <a:t>5  Translators in an IDE</a:t>
             </a:r>
           </a:p>
         </p:txBody>
@@ -4431,7 +4431,7 @@
                 <a:ea typeface="DejaVu Sans"/>
                 <a:cs typeface="DejaVu Sans"/>
               </a:rPr>
-              <a:t>Inspect the current values of price and quantity. Step over the calculation, then inspect total.</a:t>
+              <a:t>The CPU cannot execute high-level source directly. The translator enables the instructions to be executed.</a:t>
             </a:r>
           </a:p>
         </p:txBody>
@@ -4489,7 +4489,7 @@
                 <a:ea typeface="DejaVu Sans"/>
                 <a:cs typeface="DejaVu Sans"/>
               </a:rPr>
-              <a:t>6  Finding a logic error</a:t>
+              <a:t>6  Using your class IDE</a:t>
             </a:r>
           </a:p>
         </p:txBody>
@@ -4547,7 +4547,7 @@
                 <a:ea typeface="DejaVu Sans"/>
                 <a:cs typeface="DejaVu Sans"/>
               </a:rPr>
-              <a:t>Replace price + quantity with price * quantity. Test that 6 and 4 produce 24, then try another case.</a:t>
+              <a:t>Use the editor to change the source. Use the run-time environment to execute it and view the new message.</a:t>
             </a:r>
           </a:p>
         </p:txBody>
@@ -4736,7 +4736,7 @@
           <p:nvPr/>
         </p:nvPicPr>
         <p:blipFill>
-          <a:blip xmlns:r="http://schemas.openxmlformats.org/officeDocument/2006/relationships" xmlns:a="http://schemas.openxmlformats.org/drawingml/2006/main" r:embed="R46452f8f54a246bd"/>
+          <a:blip xmlns:r="http://schemas.openxmlformats.org/officeDocument/2006/relationships" xmlns:a="http://schemas.openxmlformats.org/drawingml/2006/main" r:embed="Rbb768bb85e1c4c78"/>
           <a:stretch xmlns:a="http://schemas.openxmlformats.org/drawingml/2006/main"/>
         </p:blipFill>
         <p:spPr>
@@ -4976,7 +4976,7 @@
                 <a:ea typeface="DejaVu Sans"/>
                 <a:cs typeface="DejaVu Sans"/>
               </a:rPr>
-              <a:t>Reduce typing of a long variable name: Auto-completion. Stop just before an incorrect calculation: Breakpoint. Inspect the current total: Variable watch. See a message about a missing bracket: Diagnostics</a:t>
+              <a:t>Change the source text: Editor. Read a reported error: Error diagnostics. Translate source instructions: Translator. Run the program and see output: Run-time environment</a:t>
             </a:r>
           </a:p>
           <a:p xmlns:a="http://schemas.openxmlformats.org/drawingml/2006/main">
@@ -5024,7 +5024,7 @@
                 <a:ea typeface="DejaVu Sans"/>
                 <a:cs typeface="DejaVu Sans"/>
               </a:rPr>
-              <a:t>Inspect that calculation, repair it and retest</a:t>
+              <a:t>Run-time environment</a:t>
             </a:r>
           </a:p>
         </p:txBody>
@@ -5793,7 +5793,7 @@
           <p:nvPr/>
         </p:nvPicPr>
         <p:blipFill>
-          <a:blip xmlns:r="http://schemas.openxmlformats.org/officeDocument/2006/relationships" xmlns:a="http://schemas.openxmlformats.org/drawingml/2006/main" r:embed="R4ae38e0690b84c68"/>
+          <a:blip xmlns:r="http://schemas.openxmlformats.org/officeDocument/2006/relationships" xmlns:a="http://schemas.openxmlformats.org/drawingml/2006/main" r:embed="Rc4a3c86d13604a8b"/>
           <a:stretch xmlns:a="http://schemas.openxmlformats.org/drawingml/2006/main"/>
         </p:blipFill>
         <p:spPr>
@@ -6149,7 +6149,7 @@
                 <a:ea typeface="DejaVu Sans"/>
                 <a:cs typeface="DejaVu Sans"/>
               </a:rPr>
-              <a:t>Explain how a breakpoint and a variable watch can help investigate a wrong total. [2]</a:t>
+              <a:t>Explain how an error diagnostic helps a programmer correct a problem. [2]</a:t>
             </a:r>
           </a:p>
         </p:txBody>
@@ -6338,7 +6338,7 @@
           <p:nvPr/>
         </p:nvPicPr>
         <p:blipFill>
-          <a:blip xmlns:r="http://schemas.openxmlformats.org/officeDocument/2006/relationships" xmlns:a="http://schemas.openxmlformats.org/drawingml/2006/main" r:embed="Rb6ee9e019c69462e"/>
+          <a:blip xmlns:r="http://schemas.openxmlformats.org/officeDocument/2006/relationships" xmlns:a="http://schemas.openxmlformats.org/drawingml/2006/main" r:embed="R7da8ca6159dd46d3"/>
           <a:stretch xmlns:a="http://schemas.openxmlformats.org/drawingml/2006/main"/>
         </p:blipFill>
         <p:spPr>
@@ -6578,7 +6578,7 @@
                 <a:ea typeface="DejaVu Sans"/>
                 <a:cs typeface="DejaVu Sans"/>
               </a:rPr>
-              <a:t>Why must a programmer still test code after all syntax errors have been corrected? [2]</a:t>
+              <a:t>Explain the roles of a translator and a run-time environment in an IDE. [4]</a:t>
             </a:r>
           </a:p>
         </p:txBody>
@@ -6825,7 +6825,7 @@
           <p:nvPr/>
         </p:nvPicPr>
         <p:blipFill>
-          <a:blip xmlns:r="http://schemas.openxmlformats.org/officeDocument/2006/relationships" xmlns:a="http://schemas.openxmlformats.org/drawingml/2006/main" r:embed="R327503b208f64add"/>
+          <a:blip xmlns:r="http://schemas.openxmlformats.org/officeDocument/2006/relationships" xmlns:a="http://schemas.openxmlformats.org/drawingml/2006/main" r:embed="R530906073de948eb"/>
           <a:stretch xmlns:a="http://schemas.openxmlformats.org/drawingml/2006/main"/>
         </p:blipFill>
         <p:spPr>
@@ -7065,7 +7065,7 @@
                 <a:ea typeface="DejaVu Sans"/>
                 <a:cs typeface="DejaVu Sans"/>
               </a:rPr>
-              <a:t>b  A breakpoint pauses near the calculation. The variable watch shows values to compare with the expected inputs or result.</a:t>
+              <a:t>b  It can identify a location and describe the detected problem. The programmer can use this information to find and correct the source.</a:t>
             </a:r>
           </a:p>
         </p:txBody>
@@ -7254,7 +7254,7 @@
           <p:nvPr/>
         </p:nvPicPr>
         <p:blipFill>
-          <a:blip xmlns:r="http://schemas.openxmlformats.org/officeDocument/2006/relationships" xmlns:a="http://schemas.openxmlformats.org/drawingml/2006/main" r:embed="Rb87a6d48d9324b51"/>
+          <a:blip xmlns:r="http://schemas.openxmlformats.org/officeDocument/2006/relationships" xmlns:a="http://schemas.openxmlformats.org/drawingml/2006/main" r:embed="R76591b38457b45e6"/>
           <a:stretch xmlns:a="http://schemas.openxmlformats.org/drawingml/2006/main"/>
         </p:blipFill>
         <p:spPr>
@@ -7494,7 +7494,7 @@
                 <a:ea typeface="DejaVu Sans"/>
                 <a:cs typeface="DejaVu Sans"/>
               </a:rPr>
-              <a:t>Valid syntax can still express incorrect logic.</a:t>
+              <a:t>A translator processes high-level source instructions.</a:t>
             </a:r>
           </a:p>
         </p:txBody>
@@ -7610,7 +7610,7 @@
                 <a:ea typeface="DejaVu Sans"/>
                 <a:cs typeface="DejaVu Sans"/>
               </a:rPr>
-              <a:t>Testing checks actual results against expected results.</a:t>
+              <a:t>This enables instructions the CPU cannot execute directly to be executed.</a:t>
             </a:r>
           </a:p>
         </p:txBody>
@@ -7648,7 +7648,7 @@
           </a:bodyPr>
           <a:lstStyle xmlns:a="http://schemas.openxmlformats.org/drawingml/2006/main"/>
           <a:p xmlns:a="http://schemas.openxmlformats.org/drawingml/2006/main">
-            <a:pPr>
+            <a:pPr algn="l">
               <a:buNone/>
               <a:defRPr sz="1950" b="1">
                 <a:solidFill>
@@ -7668,7 +7668,7 @@
                 <a:ea typeface="DejaVu Sans"/>
                 <a:cs typeface="DejaVu Sans"/>
               </a:rPr>
-              <a:t/>
+              <a:t>3.</a:t>
             </a:r>
           </a:p>
         </p:txBody>
@@ -7706,7 +7706,7 @@
           </a:bodyPr>
           <a:lstStyle xmlns:a="http://schemas.openxmlformats.org/drawingml/2006/main"/>
           <a:p xmlns:a="http://schemas.openxmlformats.org/drawingml/2006/main">
-            <a:pPr>
+            <a:pPr algn="l">
               <a:buNone/>
               <a:defRPr sz="1950" b="0">
                 <a:solidFill>
@@ -7726,7 +7726,7 @@
                 <a:ea typeface="DejaVu Sans"/>
                 <a:cs typeface="DejaVu Sans"/>
               </a:rPr>
-              <a:t/>
+              <a:t>A run-time environment runs the program. It lets the programmer observe output and interact with the running program.</a:t>
             </a:r>
           </a:p>
         </p:txBody>
@@ -7915,7 +7915,7 @@
           <p:nvPr/>
         </p:nvPicPr>
         <p:blipFill>
-          <a:blip xmlns:r="http://schemas.openxmlformats.org/officeDocument/2006/relationships" xmlns:a="http://schemas.openxmlformats.org/drawingml/2006/main" r:embed="R2c960484c9624cb1"/>
+          <a:blip xmlns:r="http://schemas.openxmlformats.org/officeDocument/2006/relationships" xmlns:a="http://schemas.openxmlformats.org/drawingml/2006/main" r:embed="R2ffa673005c84481"/>
           <a:stretch xmlns:a="http://schemas.openxmlformats.org/drawingml/2006/main"/>
         </p:blipFill>
         <p:spPr>
@@ -8155,7 +8155,7 @@
                 <a:ea typeface="DejaVu Sans"/>
                 <a:cs typeface="DejaVu Sans"/>
               </a:rPr>
-              <a:t>Identify common IDE facilities.</a:t>
+              <a:t>Identify the four main IDE facilities.</a:t>
             </a:r>
           </a:p>
         </p:txBody>
@@ -8271,7 +8271,7 @@
                 <a:ea typeface="DejaVu Sans"/>
                 <a:cs typeface="DejaVu Sans"/>
               </a:rPr>
-              <a:t>Explain how editing and diagnostics support programmers.</a:t>
+              <a:t>Explain how each facility supports programming.</a:t>
             </a:r>
           </a:p>
         </p:txBody>
@@ -8387,7 +8387,7 @@
                 <a:ea typeface="DejaVu Sans"/>
                 <a:cs typeface="DejaVu Sans"/>
               </a:rPr>
-              <a:t>Use a breakpoint, stepping and variable values to investigate a fault.</a:t>
+              <a:t>Use editing, diagnostics and execution tools in an IDE.</a:t>
             </a:r>
           </a:p>
         </p:txBody>
@@ -8692,7 +8692,7 @@
           <p:nvPr/>
         </p:nvPicPr>
         <p:blipFill>
-          <a:blip xmlns:r="http://schemas.openxmlformats.org/officeDocument/2006/relationships" xmlns:a="http://schemas.openxmlformats.org/drawingml/2006/main" r:embed="R13638f9c68a140d6"/>
+          <a:blip xmlns:r="http://schemas.openxmlformats.org/officeDocument/2006/relationships" xmlns:a="http://schemas.openxmlformats.org/drawingml/2006/main" r:embed="Rdd84ee2284754904"/>
           <a:stretch xmlns:a="http://schemas.openxmlformats.org/drawingml/2006/main"/>
         </p:blipFill>
         <p:spPr>
@@ -8874,7 +8874,7 @@
                 <a:ea typeface="DejaVu Sans"/>
                 <a:cs typeface="DejaVu Sans"/>
               </a:rPr>
-              <a:t>Identify common IDE facilities.</a:t>
+              <a:t>Identify the four main IDE facilities.</a:t>
             </a:r>
           </a:p>
         </p:txBody>
@@ -8990,7 +8990,7 @@
                 <a:ea typeface="DejaVu Sans"/>
                 <a:cs typeface="DejaVu Sans"/>
               </a:rPr>
-              <a:t>Explain how editing and diagnostics support programmers.</a:t>
+              <a:t>Explain how each facility supports programming.</a:t>
             </a:r>
           </a:p>
         </p:txBody>
@@ -9106,7 +9106,7 @@
                 <a:ea typeface="DejaVu Sans"/>
                 <a:cs typeface="DejaVu Sans"/>
               </a:rPr>
-              <a:t>Use a breakpoint, stepping and variable values to investigate a fault.</a:t>
+              <a:t>Use editing, diagnostics and execution tools in an IDE.</a:t>
             </a:r>
           </a:p>
         </p:txBody>
@@ -9411,7 +9411,7 @@
           <p:nvPr/>
         </p:nvPicPr>
         <p:blipFill>
-          <a:blip xmlns:r="http://schemas.openxmlformats.org/officeDocument/2006/relationships" xmlns:a="http://schemas.openxmlformats.org/drawingml/2006/main" r:embed="Rd88b39e3e2f3447d"/>
+          <a:blip xmlns:r="http://schemas.openxmlformats.org/officeDocument/2006/relationships" xmlns:a="http://schemas.openxmlformats.org/drawingml/2006/main" r:embed="Rf7089a7ddd394d33"/>
           <a:stretch xmlns:a="http://schemas.openxmlformats.org/drawingml/2006/main"/>
         </p:blipFill>
         <p:spPr>
@@ -9535,7 +9535,7 @@
                 <a:ea typeface="DejaVu Sans"/>
                 <a:cs typeface="DejaVu Sans"/>
               </a:rPr>
-              <a:t>A program runs but calculates 3 + 4 as 34. Suggest a cause and one useful piece of evidence to inspect.</a:t>
+              <a:t>A programmer needs to write source code and see its output. Name one tool for each job.</a:t>
             </a:r>
           </a:p>
         </p:txBody>
@@ -9724,7 +9724,7 @@
           <p:nvPr/>
         </p:nvPicPr>
         <p:blipFill>
-          <a:blip xmlns:r="http://schemas.openxmlformats.org/officeDocument/2006/relationships" xmlns:a="http://schemas.openxmlformats.org/drawingml/2006/main" r:embed="R11f73cbc189b4e52"/>
+          <a:blip xmlns:r="http://schemas.openxmlformats.org/officeDocument/2006/relationships" xmlns:a="http://schemas.openxmlformats.org/drawingml/2006/main" r:embed="Ra0ece0f983254977"/>
           <a:stretch xmlns:a="http://schemas.openxmlformats.org/drawingml/2006/main"/>
         </p:blipFill>
         <p:spPr>
@@ -9906,7 +9906,7 @@
                 <a:ea typeface="DejaVu Sans"/>
                 <a:cs typeface="DejaVu Sans"/>
               </a:rPr>
-              <a:t>The inputs may be strings, so + joins them. Inspect the types and values of the inputs before the calculation.</a:t>
+              <a:t>An editor is used to write the source. A run-time environment executes the program and lets the programmer view its output.</a:t>
             </a:r>
           </a:p>
         </p:txBody>
@@ -10211,7 +10211,7 @@
           <p:nvPr/>
         </p:nvPicPr>
         <p:blipFill>
-          <a:blip xmlns:r="http://schemas.openxmlformats.org/officeDocument/2006/relationships" xmlns:a="http://schemas.openxmlformats.org/drawingml/2006/main" r:embed="R213dd5e3858e481c"/>
+          <a:blip xmlns:r="http://schemas.openxmlformats.org/officeDocument/2006/relationships" xmlns:a="http://schemas.openxmlformats.org/drawingml/2006/main" r:embed="R025bfbeba80c4a37"/>
           <a:stretch xmlns:a="http://schemas.openxmlformats.org/drawingml/2006/main"/>
         </p:blipFill>
         <p:spPr>
@@ -10509,7 +10509,7 @@
                 <a:ea typeface="DejaVu Sans"/>
                 <a:cs typeface="DejaVu Sans"/>
               </a:rPr>
-              <a:t>Breakpoint</a:t>
+              <a:t>Error diagnostics</a:t>
             </a:r>
           </a:p>
         </p:txBody>
@@ -10698,7 +10698,7 @@
           <p:nvPr/>
         </p:nvPicPr>
         <p:blipFill>
-          <a:blip xmlns:r="http://schemas.openxmlformats.org/officeDocument/2006/relationships" xmlns:a="http://schemas.openxmlformats.org/drawingml/2006/main" r:embed="R609c568d6ee24224"/>
+          <a:blip xmlns:r="http://schemas.openxmlformats.org/officeDocument/2006/relationships" xmlns:a="http://schemas.openxmlformats.org/drawingml/2006/main" r:embed="R815c7dab27314d05"/>
           <a:stretch xmlns:a="http://schemas.openxmlformats.org/drawingml/2006/main"/>
         </p:blipFill>
         <p:spPr>
@@ -10880,7 +10880,7 @@
                 <a:ea typeface="DejaVu Sans"/>
                 <a:cs typeface="DejaVu Sans"/>
               </a:rPr>
-              <a:t>An integrated development environment brings programming tools together in one application.</a:t>
+              <a:t>An integrated development environment combines programming tools in one application.</a:t>
             </a:r>
           </a:p>
         </p:txBody>
@@ -10938,7 +10938,7 @@
                 <a:ea typeface="DejaVu Sans"/>
                 <a:cs typeface="DejaVu Sans"/>
               </a:rPr>
-              <a:t>Breakpoint</a:t>
+              <a:t>Error diagnostics</a:t>
             </a:r>
           </a:p>
         </p:txBody>
@@ -10996,7 +10996,7 @@
                 <a:ea typeface="DejaVu Sans"/>
                 <a:cs typeface="DejaVu Sans"/>
               </a:rPr>
-              <a:t>A chosen point where a debugger pauses execution for inspection.</a:t>
+              <a:t>Tools that report detected problems to help a programmer locate and correct them.</a:t>
             </a:r>
           </a:p>
         </p:txBody>
@@ -11185,7 +11185,7 @@
           <p:nvPr/>
         </p:nvPicPr>
         <p:blipFill>
-          <a:blip xmlns:r="http://schemas.openxmlformats.org/officeDocument/2006/relationships" xmlns:a="http://schemas.openxmlformats.org/drawingml/2006/main" r:embed="R55cb0c9d23cc43f1"/>
+          <a:blip xmlns:r="http://schemas.openxmlformats.org/officeDocument/2006/relationships" xmlns:a="http://schemas.openxmlformats.org/drawingml/2006/main" r:embed="R22f80f90adda4ed7"/>
           <a:stretch xmlns:a="http://schemas.openxmlformats.org/drawingml/2006/main"/>
         </p:blipFill>
         <p:spPr>
@@ -11904,7 +11904,7 @@
           <p:nvPr/>
         </p:nvPicPr>
         <p:blipFill>
-          <a:blip xmlns:r="http://schemas.openxmlformats.org/officeDocument/2006/relationships" xmlns:a="http://schemas.openxmlformats.org/drawingml/2006/main" r:embed="Rd7d9d4fb5c6d40c6"/>
+          <a:blip xmlns:r="http://schemas.openxmlformats.org/officeDocument/2006/relationships" xmlns:a="http://schemas.openxmlformats.org/drawingml/2006/main" r:embed="R6a400aa8fe304d1d"/>
           <a:stretch xmlns:a="http://schemas.openxmlformats.org/drawingml/2006/main"/>
         </p:blipFill>
         <p:spPr>
@@ -12028,7 +12028,7 @@
                 <a:ea typeface="DejaVu Sans"/>
                 <a:cs typeface="DejaVu Sans"/>
               </a:rPr>
-              <a:t>Return to the Do Now question. Use two things you learned in the room to improve your original answer.</a:t>
+              <a:t>In your class IDE, run print("Ready"). Change the message and run it again. Remove the closing bracket, read the diagnostic, then restore it and rerun.</a:t>
             </a:r>
           </a:p>
         </p:txBody>
@@ -12086,7 +12086,7 @@
                 <a:ea typeface="DejaVu Sans"/>
                 <a:cs typeface="DejaVu Sans"/>
               </a:rPr>
-              <a:t>Check that each reason links a specific characteristic or tool to the task.</a:t>
+              <a:t>Identify the editor, diagnostics, translator and run-time environment you used.</a:t>
             </a:r>
           </a:p>
         </p:txBody>
@@ -12275,7 +12275,7 @@
           <p:nvPr/>
         </p:nvPicPr>
         <p:blipFill>
-          <a:blip xmlns:r="http://schemas.openxmlformats.org/officeDocument/2006/relationships" xmlns:a="http://schemas.openxmlformats.org/drawingml/2006/main" r:embed="Rbfa77e0d17da4fa8"/>
+          <a:blip xmlns:r="http://schemas.openxmlformats.org/officeDocument/2006/relationships" xmlns:a="http://schemas.openxmlformats.org/drawingml/2006/main" r:embed="R51560f071ab94c71"/>
           <a:stretch xmlns:a="http://schemas.openxmlformats.org/drawingml/2006/main"/>
         </p:blipFill>
         <p:spPr>
